--- a/slides/day1_slides.pptx
+++ b/slides/day1_slides.pptx
@@ -286,7 +286,7 @@
       <p15:sldGuideLst xmlns:p15="http://schemas.microsoft.com/office/powerpoint/2012/main"/>
     </p:ext>
     <p:ext uri="GoogleSlidesCustomDataVersion2">
-      <go:slidesCustomData xmlns:go="http://customooxmlschemas.google.com/" xmlns:ahyp="http://schemas.microsoft.com/office/drawing/2018/hyperlinkcolor" xmlns:p15="http://schemas.microsoft.com/office/powerpoint/2012/main" xmlns:p14="http://schemas.microsoft.com/office/powerpoint/2010/main" xmlns:com="http://schemas.openxmlformats.org/drawingml/2006/compatibility" xmlns:pvml="urn:schemas-microsoft-com:office:powerpoint" xmlns:v="urn:schemas-microsoft-com:vml" xmlns:o="urn:schemas-microsoft-com:office:office" xmlns:dgm="http://schemas.openxmlformats.org/drawingml/2006/diagram" xmlns:c="http://schemas.openxmlformats.org/drawingml/2006/chart" xmlns:mv="urn:schemas-microsoft-com:mac:vml" xmlns:mc="http://schemas.openxmlformats.org/markup-compatibility/2006" xmlns="" r:id="rId44" roundtripDataSignature="AMtx7mi14jFXTrCmS0u2hXQXGuC3zsnMBA=="/>
+      <go:slidesCustomData xmlns="" xmlns:mc="http://schemas.openxmlformats.org/markup-compatibility/2006" xmlns:mv="urn:schemas-microsoft-com:mac:vml" xmlns:c="http://schemas.openxmlformats.org/drawingml/2006/chart" xmlns:dgm="http://schemas.openxmlformats.org/drawingml/2006/diagram" xmlns:o="urn:schemas-microsoft-com:office:office" xmlns:v="urn:schemas-microsoft-com:vml" xmlns:pvml="urn:schemas-microsoft-com:office:powerpoint" xmlns:com="http://schemas.openxmlformats.org/drawingml/2006/compatibility" xmlns:p14="http://schemas.microsoft.com/office/powerpoint/2010/main" xmlns:p15="http://schemas.microsoft.com/office/powerpoint/2012/main" xmlns:ahyp="http://schemas.microsoft.com/office/drawing/2018/hyperlinkcolor" xmlns:go="http://customooxmlschemas.google.com/" r:id="rId44" roundtripDataSignature="AMtx7mi14jFXTrCmS0u2hXQXGuC3zsnMBA=="/>
     </p:ext>
   </p:extLst>
 </p:presentation>
@@ -1956,10 +1956,30 @@
               <a:buNone/>
             </a:pPr>
             <a:r>
-              <a:rPr lang="en-US"/>
-              <a:t>https://wiki.python.org/moin/TimeComplexity</a:t>
-            </a:r>
-            <a:endParaRPr/>
+              <a:rPr lang="en-US" dirty="0"/>
+              <a:t>https://</a:t>
+            </a:r>
+            <a:r>
+              <a:rPr lang="en-US" dirty="0" err="1"/>
+              <a:t>wiki.python.org</a:t>
+            </a:r>
+            <a:r>
+              <a:rPr lang="en-US" dirty="0"/>
+              <a:t>/</a:t>
+            </a:r>
+            <a:r>
+              <a:rPr lang="en-US" dirty="0" err="1"/>
+              <a:t>moin</a:t>
+            </a:r>
+            <a:r>
+              <a:rPr lang="en-US" dirty="0"/>
+              <a:t>/</a:t>
+            </a:r>
+            <a:r>
+              <a:rPr lang="en-US" dirty="0" err="1"/>
+              <a:t>TimeComplexity</a:t>
+            </a:r>
+            <a:endParaRPr dirty="0"/>
           </a:p>
         </p:txBody>
       </p:sp>
@@ -2132,10 +2152,30 @@
               <a:buNone/>
             </a:pPr>
             <a:r>
-              <a:rPr lang="en-US"/>
-              <a:t>https://wiki.python.org/moin/TimeComplexity</a:t>
-            </a:r>
-            <a:endParaRPr/>
+              <a:rPr lang="en-US" dirty="0"/>
+              <a:t>https://</a:t>
+            </a:r>
+            <a:r>
+              <a:rPr lang="en-US" dirty="0" err="1"/>
+              <a:t>wiki.python.org</a:t>
+            </a:r>
+            <a:r>
+              <a:rPr lang="en-US" dirty="0"/>
+              <a:t>/</a:t>
+            </a:r>
+            <a:r>
+              <a:rPr lang="en-US" dirty="0" err="1"/>
+              <a:t>moin</a:t>
+            </a:r>
+            <a:r>
+              <a:rPr lang="en-US" dirty="0"/>
+              <a:t>/</a:t>
+            </a:r>
+            <a:r>
+              <a:rPr lang="en-US" dirty="0" err="1"/>
+              <a:t>TimeComplexity</a:t>
+            </a:r>
+            <a:endParaRPr dirty="0"/>
           </a:p>
         </p:txBody>
       </p:sp>
@@ -2328,10 +2368,30 @@
               <a:buNone/>
             </a:pPr>
             <a:r>
-              <a:rPr lang="en-US"/>
-              <a:t>https://wiki.python.org/moin/TimeComplexity</a:t>
-            </a:r>
-            <a:endParaRPr/>
+              <a:rPr lang="en-US" dirty="0"/>
+              <a:t>https://</a:t>
+            </a:r>
+            <a:r>
+              <a:rPr lang="en-US" dirty="0" err="1"/>
+              <a:t>wiki.python.org</a:t>
+            </a:r>
+            <a:r>
+              <a:rPr lang="en-US" dirty="0"/>
+              <a:t>/</a:t>
+            </a:r>
+            <a:r>
+              <a:rPr lang="en-US" dirty="0" err="1"/>
+              <a:t>moin</a:t>
+            </a:r>
+            <a:r>
+              <a:rPr lang="en-US" dirty="0"/>
+              <a:t>/</a:t>
+            </a:r>
+            <a:r>
+              <a:rPr lang="en-US" dirty="0" err="1"/>
+              <a:t>TimeComplexity</a:t>
+            </a:r>
+            <a:endParaRPr dirty="0"/>
           </a:p>
         </p:txBody>
       </p:sp>
@@ -2524,10 +2584,10 @@
               <a:buNone/>
             </a:pPr>
             <a:r>
-              <a:rPr lang="en-US"/>
+              <a:rPr lang="en-US" dirty="0"/>
               <a:t>In class, show example of each on the board</a:t>
             </a:r>
-            <a:endParaRPr/>
+            <a:endParaRPr dirty="0"/>
           </a:p>
           <a:p>
             <a:pPr marL="0" lvl="0" indent="0" algn="l" rtl="0">
@@ -2544,10 +2604,10 @@
               <a:buNone/>
             </a:pPr>
             <a:r>
-              <a:rPr lang="en-US"/>
+              <a:rPr lang="en-US" dirty="0"/>
               <a:t>IF Class is new to bit operations, draw Truth Tables on the board!</a:t>
             </a:r>
-            <a:endParaRPr/>
+            <a:endParaRPr dirty="0"/>
           </a:p>
         </p:txBody>
       </p:sp>
@@ -2740,10 +2800,30 @@
               <a:buNone/>
             </a:pPr>
             <a:r>
-              <a:rPr lang="en-US"/>
-              <a:t>https://wiki.python.org/moin/TimeComplexity</a:t>
-            </a:r>
-            <a:endParaRPr/>
+              <a:rPr lang="en-US" dirty="0"/>
+              <a:t>https://</a:t>
+            </a:r>
+            <a:r>
+              <a:rPr lang="en-US" dirty="0" err="1"/>
+              <a:t>wiki.python.org</a:t>
+            </a:r>
+            <a:r>
+              <a:rPr lang="en-US" dirty="0"/>
+              <a:t>/</a:t>
+            </a:r>
+            <a:r>
+              <a:rPr lang="en-US" dirty="0" err="1"/>
+              <a:t>moin</a:t>
+            </a:r>
+            <a:r>
+              <a:rPr lang="en-US" dirty="0"/>
+              <a:t>/</a:t>
+            </a:r>
+            <a:r>
+              <a:rPr lang="en-US" dirty="0" err="1"/>
+              <a:t>TimeComplexity</a:t>
+            </a:r>
+            <a:endParaRPr dirty="0"/>
           </a:p>
         </p:txBody>
       </p:sp>
@@ -2936,10 +3016,30 @@
               <a:buNone/>
             </a:pPr>
             <a:r>
-              <a:rPr lang="en-US"/>
-              <a:t>https://wiki.python.org/moin/TimeComplexity</a:t>
-            </a:r>
-            <a:endParaRPr/>
+              <a:rPr lang="en-US" dirty="0"/>
+              <a:t>https://</a:t>
+            </a:r>
+            <a:r>
+              <a:rPr lang="en-US" dirty="0" err="1"/>
+              <a:t>wiki.python.org</a:t>
+            </a:r>
+            <a:r>
+              <a:rPr lang="en-US" dirty="0"/>
+              <a:t>/</a:t>
+            </a:r>
+            <a:r>
+              <a:rPr lang="en-US" dirty="0" err="1"/>
+              <a:t>moin</a:t>
+            </a:r>
+            <a:r>
+              <a:rPr lang="en-US" dirty="0"/>
+              <a:t>/</a:t>
+            </a:r>
+            <a:r>
+              <a:rPr lang="en-US" dirty="0" err="1"/>
+              <a:t>TimeComplexity</a:t>
+            </a:r>
+            <a:endParaRPr dirty="0"/>
           </a:p>
         </p:txBody>
       </p:sp>
@@ -3132,10 +3232,30 @@
               <a:buNone/>
             </a:pPr>
             <a:r>
-              <a:rPr lang="en-US"/>
-              <a:t>https://wiki.python.org/moin/TimeComplexity</a:t>
-            </a:r>
-            <a:endParaRPr/>
+              <a:rPr lang="en-US" dirty="0"/>
+              <a:t>https://</a:t>
+            </a:r>
+            <a:r>
+              <a:rPr lang="en-US" dirty="0" err="1"/>
+              <a:t>wiki.python.org</a:t>
+            </a:r>
+            <a:r>
+              <a:rPr lang="en-US" dirty="0"/>
+              <a:t>/</a:t>
+            </a:r>
+            <a:r>
+              <a:rPr lang="en-US" dirty="0" err="1"/>
+              <a:t>moin</a:t>
+            </a:r>
+            <a:r>
+              <a:rPr lang="en-US" dirty="0"/>
+              <a:t>/</a:t>
+            </a:r>
+            <a:r>
+              <a:rPr lang="en-US" dirty="0" err="1"/>
+              <a:t>TimeComplexity</a:t>
+            </a:r>
+            <a:endParaRPr dirty="0"/>
           </a:p>
         </p:txBody>
       </p:sp>
@@ -3328,10 +3448,30 @@
               <a:buNone/>
             </a:pPr>
             <a:r>
-              <a:rPr lang="en-US"/>
-              <a:t>https://wiki.python.org/moin/TimeComplexity</a:t>
-            </a:r>
-            <a:endParaRPr/>
+              <a:rPr lang="en-US" dirty="0"/>
+              <a:t>https://</a:t>
+            </a:r>
+            <a:r>
+              <a:rPr lang="en-US" dirty="0" err="1"/>
+              <a:t>wiki.python.org</a:t>
+            </a:r>
+            <a:r>
+              <a:rPr lang="en-US" dirty="0"/>
+              <a:t>/</a:t>
+            </a:r>
+            <a:r>
+              <a:rPr lang="en-US" dirty="0" err="1"/>
+              <a:t>moin</a:t>
+            </a:r>
+            <a:r>
+              <a:rPr lang="en-US" dirty="0"/>
+              <a:t>/</a:t>
+            </a:r>
+            <a:r>
+              <a:rPr lang="en-US" dirty="0" err="1"/>
+              <a:t>TimeComplexity</a:t>
+            </a:r>
+            <a:endParaRPr dirty="0"/>
           </a:p>
         </p:txBody>
       </p:sp>
@@ -3524,10 +3664,30 @@
               <a:buNone/>
             </a:pPr>
             <a:r>
-              <a:rPr lang="en-US"/>
-              <a:t>https://wiki.python.org/moin/TimeComplexity</a:t>
-            </a:r>
-            <a:endParaRPr/>
+              <a:rPr lang="en-US" dirty="0"/>
+              <a:t>https://</a:t>
+            </a:r>
+            <a:r>
+              <a:rPr lang="en-US" dirty="0" err="1"/>
+              <a:t>wiki.python.org</a:t>
+            </a:r>
+            <a:r>
+              <a:rPr lang="en-US" dirty="0"/>
+              <a:t>/</a:t>
+            </a:r>
+            <a:r>
+              <a:rPr lang="en-US" dirty="0" err="1"/>
+              <a:t>moin</a:t>
+            </a:r>
+            <a:r>
+              <a:rPr lang="en-US" dirty="0"/>
+              <a:t>/</a:t>
+            </a:r>
+            <a:r>
+              <a:rPr lang="en-US" dirty="0" err="1"/>
+              <a:t>TimeComplexity</a:t>
+            </a:r>
+            <a:endParaRPr dirty="0"/>
           </a:p>
         </p:txBody>
       </p:sp>
@@ -3905,10 +4065,30 @@
               <a:buNone/>
             </a:pPr>
             <a:r>
-              <a:rPr lang="en-US"/>
-              <a:t>https://wiki.python.org/moin/TimeComplexity</a:t>
-            </a:r>
-            <a:endParaRPr/>
+              <a:rPr lang="en-US" dirty="0"/>
+              <a:t>https://</a:t>
+            </a:r>
+            <a:r>
+              <a:rPr lang="en-US" dirty="0" err="1"/>
+              <a:t>wiki.python.org</a:t>
+            </a:r>
+            <a:r>
+              <a:rPr lang="en-US" dirty="0"/>
+              <a:t>/</a:t>
+            </a:r>
+            <a:r>
+              <a:rPr lang="en-US" dirty="0" err="1"/>
+              <a:t>moin</a:t>
+            </a:r>
+            <a:r>
+              <a:rPr lang="en-US" dirty="0"/>
+              <a:t>/</a:t>
+            </a:r>
+            <a:r>
+              <a:rPr lang="en-US" dirty="0" err="1"/>
+              <a:t>TimeComplexity</a:t>
+            </a:r>
+            <a:endParaRPr dirty="0"/>
           </a:p>
         </p:txBody>
       </p:sp>
@@ -4101,10 +4281,30 @@
               <a:buNone/>
             </a:pPr>
             <a:r>
-              <a:rPr lang="en-US"/>
-              <a:t>https://wiki.python.org/moin/TimeComplexity</a:t>
-            </a:r>
-            <a:endParaRPr/>
+              <a:rPr lang="en-US" dirty="0"/>
+              <a:t>https://</a:t>
+            </a:r>
+            <a:r>
+              <a:rPr lang="en-US" dirty="0" err="1"/>
+              <a:t>wiki.python.org</a:t>
+            </a:r>
+            <a:r>
+              <a:rPr lang="en-US" dirty="0"/>
+              <a:t>/</a:t>
+            </a:r>
+            <a:r>
+              <a:rPr lang="en-US" dirty="0" err="1"/>
+              <a:t>moin</a:t>
+            </a:r>
+            <a:r>
+              <a:rPr lang="en-US" dirty="0"/>
+              <a:t>/</a:t>
+            </a:r>
+            <a:r>
+              <a:rPr lang="en-US" dirty="0" err="1"/>
+              <a:t>TimeComplexity</a:t>
+            </a:r>
+            <a:endParaRPr dirty="0"/>
           </a:p>
         </p:txBody>
       </p:sp>
@@ -4476,10 +4676,30 @@
               <a:buNone/>
             </a:pPr>
             <a:r>
-              <a:rPr lang="en-US"/>
-              <a:t>https://wiki.python.org/moin/TimeComplexity</a:t>
-            </a:r>
-            <a:endParaRPr/>
+              <a:rPr lang="en-US" dirty="0"/>
+              <a:t>https://</a:t>
+            </a:r>
+            <a:r>
+              <a:rPr lang="en-US" dirty="0" err="1"/>
+              <a:t>wiki.python.org</a:t>
+            </a:r>
+            <a:r>
+              <a:rPr lang="en-US" dirty="0"/>
+              <a:t>/</a:t>
+            </a:r>
+            <a:r>
+              <a:rPr lang="en-US" dirty="0" err="1"/>
+              <a:t>moin</a:t>
+            </a:r>
+            <a:r>
+              <a:rPr lang="en-US" dirty="0"/>
+              <a:t>/</a:t>
+            </a:r>
+            <a:r>
+              <a:rPr lang="en-US" dirty="0" err="1"/>
+              <a:t>TimeComplexity</a:t>
+            </a:r>
+            <a:endParaRPr dirty="0"/>
           </a:p>
         </p:txBody>
       </p:sp>
@@ -4652,10 +4872,30 @@
               <a:buNone/>
             </a:pPr>
             <a:r>
-              <a:rPr lang="en-US"/>
-              <a:t>https://wiki.python.org/moin/TimeComplexity</a:t>
-            </a:r>
-            <a:endParaRPr/>
+              <a:rPr lang="en-US" dirty="0"/>
+              <a:t>https://</a:t>
+            </a:r>
+            <a:r>
+              <a:rPr lang="en-US" dirty="0" err="1"/>
+              <a:t>wiki.python.org</a:t>
+            </a:r>
+            <a:r>
+              <a:rPr lang="en-US" dirty="0"/>
+              <a:t>/</a:t>
+            </a:r>
+            <a:r>
+              <a:rPr lang="en-US" dirty="0" err="1"/>
+              <a:t>moin</a:t>
+            </a:r>
+            <a:r>
+              <a:rPr lang="en-US" dirty="0"/>
+              <a:t>/</a:t>
+            </a:r>
+            <a:r>
+              <a:rPr lang="en-US" dirty="0" err="1"/>
+              <a:t>TimeComplexity</a:t>
+            </a:r>
+            <a:endParaRPr dirty="0"/>
           </a:p>
         </p:txBody>
       </p:sp>
@@ -4828,10 +5068,30 @@
               <a:buNone/>
             </a:pPr>
             <a:r>
-              <a:rPr lang="en-US"/>
-              <a:t>https://wiki.python.org/moin/TimeComplexity</a:t>
-            </a:r>
-            <a:endParaRPr/>
+              <a:rPr lang="en-US" dirty="0"/>
+              <a:t>https://</a:t>
+            </a:r>
+            <a:r>
+              <a:rPr lang="en-US" dirty="0" err="1"/>
+              <a:t>wiki.python.org</a:t>
+            </a:r>
+            <a:r>
+              <a:rPr lang="en-US" dirty="0"/>
+              <a:t>/</a:t>
+            </a:r>
+            <a:r>
+              <a:rPr lang="en-US" dirty="0" err="1"/>
+              <a:t>moin</a:t>
+            </a:r>
+            <a:r>
+              <a:rPr lang="en-US" dirty="0"/>
+              <a:t>/</a:t>
+            </a:r>
+            <a:r>
+              <a:rPr lang="en-US" dirty="0" err="1"/>
+              <a:t>TimeComplexity</a:t>
+            </a:r>
+            <a:endParaRPr dirty="0"/>
           </a:p>
         </p:txBody>
       </p:sp>
@@ -5004,10 +5264,30 @@
               <a:buNone/>
             </a:pPr>
             <a:r>
-              <a:rPr lang="en-US"/>
-              <a:t>https://wiki.python.org/moin/TimeComplexity</a:t>
-            </a:r>
-            <a:endParaRPr/>
+              <a:rPr lang="en-US" dirty="0"/>
+              <a:t>https://</a:t>
+            </a:r>
+            <a:r>
+              <a:rPr lang="en-US" dirty="0" err="1"/>
+              <a:t>wiki.python.org</a:t>
+            </a:r>
+            <a:r>
+              <a:rPr lang="en-US" dirty="0"/>
+              <a:t>/</a:t>
+            </a:r>
+            <a:r>
+              <a:rPr lang="en-US" dirty="0" err="1"/>
+              <a:t>moin</a:t>
+            </a:r>
+            <a:r>
+              <a:rPr lang="en-US" dirty="0"/>
+              <a:t>/</a:t>
+            </a:r>
+            <a:r>
+              <a:rPr lang="en-US" dirty="0" err="1"/>
+              <a:t>TimeComplexity</a:t>
+            </a:r>
+            <a:endParaRPr dirty="0"/>
           </a:p>
         </p:txBody>
       </p:sp>
@@ -5180,10 +5460,30 @@
               <a:buNone/>
             </a:pPr>
             <a:r>
-              <a:rPr lang="en-US"/>
-              <a:t>https://wiki.python.org/moin/TimeComplexity</a:t>
-            </a:r>
-            <a:endParaRPr/>
+              <a:rPr lang="en-US" dirty="0"/>
+              <a:t>https://</a:t>
+            </a:r>
+            <a:r>
+              <a:rPr lang="en-US" dirty="0" err="1"/>
+              <a:t>wiki.python.org</a:t>
+            </a:r>
+            <a:r>
+              <a:rPr lang="en-US" dirty="0"/>
+              <a:t>/</a:t>
+            </a:r>
+            <a:r>
+              <a:rPr lang="en-US" dirty="0" err="1"/>
+              <a:t>moin</a:t>
+            </a:r>
+            <a:r>
+              <a:rPr lang="en-US" dirty="0"/>
+              <a:t>/</a:t>
+            </a:r>
+            <a:r>
+              <a:rPr lang="en-US" dirty="0" err="1"/>
+              <a:t>TimeComplexity</a:t>
+            </a:r>
+            <a:endParaRPr dirty="0"/>
           </a:p>
         </p:txBody>
       </p:sp>
@@ -5356,10 +5656,30 @@
               <a:buNone/>
             </a:pPr>
             <a:r>
-              <a:rPr lang="en-US"/>
-              <a:t>https://wiki.python.org/moin/TimeComplexity</a:t>
-            </a:r>
-            <a:endParaRPr/>
+              <a:rPr lang="en-US" dirty="0"/>
+              <a:t>https://</a:t>
+            </a:r>
+            <a:r>
+              <a:rPr lang="en-US" dirty="0" err="1"/>
+              <a:t>wiki.python.org</a:t>
+            </a:r>
+            <a:r>
+              <a:rPr lang="en-US" dirty="0"/>
+              <a:t>/</a:t>
+            </a:r>
+            <a:r>
+              <a:rPr lang="en-US" dirty="0" err="1"/>
+              <a:t>moin</a:t>
+            </a:r>
+            <a:r>
+              <a:rPr lang="en-US" dirty="0"/>
+              <a:t>/</a:t>
+            </a:r>
+            <a:r>
+              <a:rPr lang="en-US" dirty="0" err="1"/>
+              <a:t>TimeComplexity</a:t>
+            </a:r>
+            <a:endParaRPr dirty="0"/>
           </a:p>
         </p:txBody>
       </p:sp>
@@ -5532,10 +5852,30 @@
               <a:buNone/>
             </a:pPr>
             <a:r>
-              <a:rPr lang="en-US"/>
-              <a:t>https://wiki.python.org/moin/TimeComplexity</a:t>
-            </a:r>
-            <a:endParaRPr/>
+              <a:rPr lang="en-US" dirty="0"/>
+              <a:t>https://</a:t>
+            </a:r>
+            <a:r>
+              <a:rPr lang="en-US" dirty="0" err="1"/>
+              <a:t>wiki.python.org</a:t>
+            </a:r>
+            <a:r>
+              <a:rPr lang="en-US" dirty="0"/>
+              <a:t>/</a:t>
+            </a:r>
+            <a:r>
+              <a:rPr lang="en-US" dirty="0" err="1"/>
+              <a:t>moin</a:t>
+            </a:r>
+            <a:r>
+              <a:rPr lang="en-US" dirty="0"/>
+              <a:t>/</a:t>
+            </a:r>
+            <a:r>
+              <a:rPr lang="en-US" dirty="0" err="1"/>
+              <a:t>TimeComplexity</a:t>
+            </a:r>
+            <a:endParaRPr dirty="0"/>
           </a:p>
         </p:txBody>
       </p:sp>
@@ -5943,10 +6283,30 @@
               <a:buNone/>
             </a:pPr>
             <a:r>
-              <a:rPr lang="en-US"/>
-              <a:t>https://wiki.python.org/moin/TimeComplexity</a:t>
-            </a:r>
-            <a:endParaRPr/>
+              <a:rPr lang="en-US" dirty="0"/>
+              <a:t>https://</a:t>
+            </a:r>
+            <a:r>
+              <a:rPr lang="en-US" dirty="0" err="1"/>
+              <a:t>wiki.python.org</a:t>
+            </a:r>
+            <a:r>
+              <a:rPr lang="en-US" dirty="0"/>
+              <a:t>/</a:t>
+            </a:r>
+            <a:r>
+              <a:rPr lang="en-US" dirty="0" err="1"/>
+              <a:t>moin</a:t>
+            </a:r>
+            <a:r>
+              <a:rPr lang="en-US" dirty="0"/>
+              <a:t>/</a:t>
+            </a:r>
+            <a:r>
+              <a:rPr lang="en-US" dirty="0" err="1"/>
+              <a:t>TimeComplexity</a:t>
+            </a:r>
+            <a:endParaRPr dirty="0"/>
           </a:p>
         </p:txBody>
       </p:sp>
@@ -6130,10 +6490,30 @@
               <a:buNone/>
             </a:pPr>
             <a:r>
-              <a:rPr lang="en-US"/>
-              <a:t>https://wiki.python.org/moin/TimeComplexity</a:t>
-            </a:r>
-            <a:endParaRPr/>
+              <a:rPr lang="en-US" dirty="0"/>
+              <a:t>https://</a:t>
+            </a:r>
+            <a:r>
+              <a:rPr lang="en-US" dirty="0" err="1"/>
+              <a:t>wiki.python.org</a:t>
+            </a:r>
+            <a:r>
+              <a:rPr lang="en-US" dirty="0"/>
+              <a:t>/</a:t>
+            </a:r>
+            <a:r>
+              <a:rPr lang="en-US" dirty="0" err="1"/>
+              <a:t>moin</a:t>
+            </a:r>
+            <a:r>
+              <a:rPr lang="en-US" dirty="0"/>
+              <a:t>/</a:t>
+            </a:r>
+            <a:r>
+              <a:rPr lang="en-US" dirty="0" err="1"/>
+              <a:t>TimeComplexity</a:t>
+            </a:r>
+            <a:endParaRPr dirty="0"/>
           </a:p>
         </p:txBody>
       </p:sp>
@@ -6306,10 +6686,30 @@
               <a:buNone/>
             </a:pPr>
             <a:r>
-              <a:rPr lang="en-US"/>
-              <a:t>https://wiki.python.org/moin/TimeComplexity</a:t>
-            </a:r>
-            <a:endParaRPr/>
+              <a:rPr lang="en-US" dirty="0"/>
+              <a:t>https://</a:t>
+            </a:r>
+            <a:r>
+              <a:rPr lang="en-US" dirty="0" err="1"/>
+              <a:t>wiki.python.org</a:t>
+            </a:r>
+            <a:r>
+              <a:rPr lang="en-US" dirty="0"/>
+              <a:t>/</a:t>
+            </a:r>
+            <a:r>
+              <a:rPr lang="en-US" dirty="0" err="1"/>
+              <a:t>moin</a:t>
+            </a:r>
+            <a:r>
+              <a:rPr lang="en-US" dirty="0"/>
+              <a:t>/</a:t>
+            </a:r>
+            <a:r>
+              <a:rPr lang="en-US" dirty="0" err="1"/>
+              <a:t>TimeComplexity</a:t>
+            </a:r>
+            <a:endParaRPr dirty="0"/>
           </a:p>
         </p:txBody>
       </p:sp>
@@ -6500,10 +6900,30 @@
               <a:buNone/>
             </a:pPr>
             <a:r>
-              <a:rPr lang="en-US"/>
-              <a:t>https://wiki.python.org/moin/TimeComplexity</a:t>
-            </a:r>
-            <a:endParaRPr/>
+              <a:rPr lang="en-US" dirty="0"/>
+              <a:t>https://</a:t>
+            </a:r>
+            <a:r>
+              <a:rPr lang="en-US" dirty="0" err="1"/>
+              <a:t>wiki.python.org</a:t>
+            </a:r>
+            <a:r>
+              <a:rPr lang="en-US" dirty="0"/>
+              <a:t>/</a:t>
+            </a:r>
+            <a:r>
+              <a:rPr lang="en-US" dirty="0" err="1"/>
+              <a:t>moin</a:t>
+            </a:r>
+            <a:r>
+              <a:rPr lang="en-US" dirty="0"/>
+              <a:t>/</a:t>
+            </a:r>
+            <a:r>
+              <a:rPr lang="en-US" dirty="0" err="1"/>
+              <a:t>TimeComplexity</a:t>
+            </a:r>
+            <a:endParaRPr dirty="0"/>
           </a:p>
         </p:txBody>
       </p:sp>
@@ -6705,10 +7125,30 @@
               <a:buNone/>
             </a:pPr>
             <a:r>
-              <a:rPr lang="en-US"/>
-              <a:t>https://wiki.python.org/moin/TimeComplexity</a:t>
-            </a:r>
-            <a:endParaRPr/>
+              <a:rPr lang="en-US" dirty="0"/>
+              <a:t>https://</a:t>
+            </a:r>
+            <a:r>
+              <a:rPr lang="en-US" dirty="0" err="1"/>
+              <a:t>wiki.python.org</a:t>
+            </a:r>
+            <a:r>
+              <a:rPr lang="en-US" dirty="0"/>
+              <a:t>/</a:t>
+            </a:r>
+            <a:r>
+              <a:rPr lang="en-US" dirty="0" err="1"/>
+              <a:t>moin</a:t>
+            </a:r>
+            <a:r>
+              <a:rPr lang="en-US" dirty="0"/>
+              <a:t>/</a:t>
+            </a:r>
+            <a:r>
+              <a:rPr lang="en-US" dirty="0" err="1"/>
+              <a:t>TimeComplexity</a:t>
+            </a:r>
+            <a:endParaRPr dirty="0"/>
           </a:p>
         </p:txBody>
       </p:sp>
@@ -6892,10 +7332,30 @@
               <a:buNone/>
             </a:pPr>
             <a:r>
-              <a:rPr lang="en-US"/>
-              <a:t>https://wiki.python.org/moin/TimeComplexity</a:t>
-            </a:r>
-            <a:endParaRPr/>
+              <a:rPr lang="en-US" dirty="0"/>
+              <a:t>https://</a:t>
+            </a:r>
+            <a:r>
+              <a:rPr lang="en-US" dirty="0" err="1"/>
+              <a:t>wiki.python.org</a:t>
+            </a:r>
+            <a:r>
+              <a:rPr lang="en-US" dirty="0"/>
+              <a:t>/</a:t>
+            </a:r>
+            <a:r>
+              <a:rPr lang="en-US" dirty="0" err="1"/>
+              <a:t>moin</a:t>
+            </a:r>
+            <a:r>
+              <a:rPr lang="en-US" dirty="0"/>
+              <a:t>/</a:t>
+            </a:r>
+            <a:r>
+              <a:rPr lang="en-US" dirty="0" err="1"/>
+              <a:t>TimeComplexity</a:t>
+            </a:r>
+            <a:endParaRPr dirty="0"/>
           </a:p>
         </p:txBody>
       </p:sp>
@@ -7068,10 +7528,30 @@
               <a:buNone/>
             </a:pPr>
             <a:r>
-              <a:rPr lang="en-US"/>
-              <a:t>https://wiki.python.org/moin/TimeComplexity</a:t>
-            </a:r>
-            <a:endParaRPr/>
+              <a:rPr lang="en-US" dirty="0"/>
+              <a:t>https://</a:t>
+            </a:r>
+            <a:r>
+              <a:rPr lang="en-US" dirty="0" err="1"/>
+              <a:t>wiki.python.org</a:t>
+            </a:r>
+            <a:r>
+              <a:rPr lang="en-US" dirty="0"/>
+              <a:t>/</a:t>
+            </a:r>
+            <a:r>
+              <a:rPr lang="en-US" dirty="0" err="1"/>
+              <a:t>moin</a:t>
+            </a:r>
+            <a:r>
+              <a:rPr lang="en-US" dirty="0"/>
+              <a:t>/</a:t>
+            </a:r>
+            <a:r>
+              <a:rPr lang="en-US" dirty="0" err="1"/>
+              <a:t>TimeComplexity</a:t>
+            </a:r>
+            <a:endParaRPr dirty="0"/>
           </a:p>
         </p:txBody>
       </p:sp>
@@ -7244,10 +7724,10 @@
               <a:buNone/>
             </a:pPr>
             <a:r>
-              <a:rPr lang="en-US"/>
+              <a:rPr lang="en-US" dirty="0"/>
               <a:t>Let’s introduce the Range Query Sum!</a:t>
             </a:r>
-            <a:endParaRPr/>
+            <a:endParaRPr dirty="0"/>
           </a:p>
         </p:txBody>
       </p:sp>
@@ -7440,10 +7920,10 @@
               <a:buNone/>
             </a:pPr>
             <a:r>
-              <a:rPr lang="en-US"/>
+              <a:rPr lang="en-US" dirty="0"/>
               <a:t>Let’s introduce the Range Query Sum!</a:t>
             </a:r>
-            <a:endParaRPr/>
+            <a:endParaRPr dirty="0"/>
           </a:p>
         </p:txBody>
       </p:sp>
@@ -7623,23 +8103,33 @@
           <a:lstStyle/>
           <a:p>
             <a:pPr marL="0" lvl="0" indent="0" algn="l" rtl="0">
-              <a:lnSpc>
-                <a:spcPct val="100000"/>
-              </a:lnSpc>
-              <a:spcBef>
-                <a:spcPts val="0"/>
-              </a:spcBef>
-              <a:spcAft>
-                <a:spcPts val="0"/>
-              </a:spcAft>
-              <a:buSzPts val="1400"/>
+              <a:spcBef>
+                <a:spcPts val="0"/>
+              </a:spcBef>
+              <a:spcAft>
+                <a:spcPts val="0"/>
+              </a:spcAft>
               <a:buNone/>
             </a:pPr>
             <a:r>
-              <a:rPr lang="en-US"/>
-              <a:t>https://wiki.python.org/moin/TimeComplexity</a:t>
-            </a:r>
-            <a:endParaRPr/>
+              <a:rPr lang="en-US" dirty="0"/>
+              <a:t>There is more! Like Segment Trees and Range Trees.</a:t>
+            </a:r>
+          </a:p>
+          <a:p>
+            <a:pPr marL="0" lvl="0" indent="0" algn="l" rtl="0">
+              <a:spcBef>
+                <a:spcPts val="0"/>
+              </a:spcBef>
+              <a:spcAft>
+                <a:spcPts val="0"/>
+              </a:spcAft>
+              <a:buNone/>
+            </a:pPr>
+            <a:r>
+              <a:rPr lang="en-US" dirty="0"/>
+              <a:t>Highly suggest reading about segment trees!</a:t>
+            </a:r>
           </a:p>
         </p:txBody>
       </p:sp>
@@ -8042,11 +8532,7 @@
               </a:spcAft>
               <a:buNone/>
             </a:pPr>
-            <a:r>
-              <a:rPr lang="en-US"/>
-              <a:t>https://wiki.python.org/moin/TimeComplexity</a:t>
-            </a:r>
-            <a:endParaRPr/>
+            <a:endParaRPr dirty="0"/>
           </a:p>
         </p:txBody>
       </p:sp>
@@ -8240,10 +8726,30 @@
               <a:buNone/>
             </a:pPr>
             <a:r>
-              <a:rPr lang="en-US"/>
-              <a:t>https://wiki.python.org/moin/TimeComplexity</a:t>
-            </a:r>
-            <a:endParaRPr/>
+              <a:rPr lang="en-US" dirty="0"/>
+              <a:t>https://</a:t>
+            </a:r>
+            <a:r>
+              <a:rPr lang="en-US" dirty="0" err="1"/>
+              <a:t>wiki.python.org</a:t>
+            </a:r>
+            <a:r>
+              <a:rPr lang="en-US" dirty="0"/>
+              <a:t>/</a:t>
+            </a:r>
+            <a:r>
+              <a:rPr lang="en-US" dirty="0" err="1"/>
+              <a:t>moin</a:t>
+            </a:r>
+            <a:r>
+              <a:rPr lang="en-US" dirty="0"/>
+              <a:t>/</a:t>
+            </a:r>
+            <a:r>
+              <a:rPr lang="en-US" dirty="0" err="1"/>
+              <a:t>TimeComplexity</a:t>
+            </a:r>
+            <a:endParaRPr dirty="0"/>
           </a:p>
         </p:txBody>
       </p:sp>
@@ -8419,10 +8925,30 @@
               <a:buNone/>
             </a:pPr>
             <a:r>
-              <a:rPr lang="en-US"/>
-              <a:t>https://wiki.python.org/moin/TimeComplexity</a:t>
-            </a:r>
-            <a:endParaRPr/>
+              <a:rPr lang="en-US" dirty="0"/>
+              <a:t>https://</a:t>
+            </a:r>
+            <a:r>
+              <a:rPr lang="en-US" dirty="0" err="1"/>
+              <a:t>wiki.python.org</a:t>
+            </a:r>
+            <a:r>
+              <a:rPr lang="en-US" dirty="0"/>
+              <a:t>/</a:t>
+            </a:r>
+            <a:r>
+              <a:rPr lang="en-US" dirty="0" err="1"/>
+              <a:t>moin</a:t>
+            </a:r>
+            <a:r>
+              <a:rPr lang="en-US" dirty="0"/>
+              <a:t>/</a:t>
+            </a:r>
+            <a:r>
+              <a:rPr lang="en-US" dirty="0" err="1"/>
+              <a:t>TimeComplexity</a:t>
+            </a:r>
+            <a:endParaRPr dirty="0"/>
           </a:p>
         </p:txBody>
       </p:sp>
@@ -8587,10 +9113,30 @@
               <a:buNone/>
             </a:pPr>
             <a:r>
-              <a:rPr lang="en-US"/>
-              <a:t>https://wiki.python.org/moin/TimeComplexity</a:t>
-            </a:r>
-            <a:endParaRPr/>
+              <a:rPr lang="en-US" dirty="0"/>
+              <a:t>https://</a:t>
+            </a:r>
+            <a:r>
+              <a:rPr lang="en-US" dirty="0" err="1"/>
+              <a:t>wiki.python.org</a:t>
+            </a:r>
+            <a:r>
+              <a:rPr lang="en-US" dirty="0"/>
+              <a:t>/</a:t>
+            </a:r>
+            <a:r>
+              <a:rPr lang="en-US" dirty="0" err="1"/>
+              <a:t>moin</a:t>
+            </a:r>
+            <a:r>
+              <a:rPr lang="en-US" dirty="0"/>
+              <a:t>/</a:t>
+            </a:r>
+            <a:r>
+              <a:rPr lang="en-US" dirty="0" err="1"/>
+              <a:t>TimeComplexity</a:t>
+            </a:r>
+            <a:endParaRPr dirty="0"/>
           </a:p>
         </p:txBody>
       </p:sp>
@@ -8760,17 +9306,17 @@
               <a:buChar char="-"/>
             </a:pPr>
             <a:r>
-              <a:rPr lang="en-US"/>
+              <a:rPr lang="en-US" dirty="0"/>
               <a:t>Quickly go through, can skip after the first 3 bullet points</a:t>
             </a:r>
             <a:br>
-              <a:rPr lang="en-US"/>
+              <a:rPr lang="en-US" dirty="0"/>
             </a:br>
             <a:r>
-              <a:rPr lang="en-US"/>
+              <a:rPr lang="en-US" dirty="0"/>
               <a:t>Graph represents nodes and paths</a:t>
             </a:r>
-            <a:endParaRPr/>
+            <a:endParaRPr dirty="0"/>
           </a:p>
           <a:p>
             <a:pPr marL="171450" lvl="0" indent="-171450" algn="l" rtl="0">
@@ -8788,10 +9334,10 @@
               <a:buChar char="-"/>
             </a:pPr>
             <a:r>
-              <a:rPr lang="en-US"/>
+              <a:rPr lang="en-US" dirty="0"/>
               <a:t>Undirected/Directed</a:t>
             </a:r>
-            <a:endParaRPr/>
+            <a:endParaRPr dirty="0"/>
           </a:p>
           <a:p>
             <a:pPr marL="171450" lvl="0" indent="-171450" algn="l" rtl="0">
@@ -8809,10 +9355,10 @@
               <a:buChar char="-"/>
             </a:pPr>
             <a:r>
-              <a:rPr lang="en-US"/>
+              <a:rPr lang="en-US" dirty="0"/>
               <a:t>Directed Acyclic</a:t>
             </a:r>
-            <a:endParaRPr/>
+            <a:endParaRPr dirty="0"/>
           </a:p>
           <a:p>
             <a:pPr marL="171450" lvl="0" indent="-171450" algn="l" rtl="0">
@@ -8830,10 +9376,10 @@
               <a:buChar char="-"/>
             </a:pPr>
             <a:r>
-              <a:rPr lang="en-US"/>
+              <a:rPr lang="en-US" dirty="0"/>
               <a:t>Tree: pick any 2 points, there is only 1 path between them</a:t>
             </a:r>
-            <a:endParaRPr/>
+            <a:endParaRPr dirty="0"/>
           </a:p>
           <a:p>
             <a:pPr marL="171450" lvl="0" indent="-171450" algn="l" rtl="0">
@@ -8851,10 +9397,10 @@
               <a:buChar char="-"/>
             </a:pPr>
             <a:r>
-              <a:rPr lang="en-US"/>
+              <a:rPr lang="en-US" dirty="0"/>
               <a:t>Forest: a bunch of trees</a:t>
             </a:r>
-            <a:endParaRPr/>
+            <a:endParaRPr dirty="0"/>
           </a:p>
           <a:p>
             <a:pPr marL="171450" lvl="0" indent="-171450" algn="l" rtl="0">
@@ -8872,10 +9418,10 @@
               <a:buChar char="-"/>
             </a:pPr>
             <a:r>
-              <a:rPr lang="en-US"/>
+              <a:rPr lang="en-US" dirty="0"/>
               <a:t>Complete Graph: every point directly connects to every other point</a:t>
             </a:r>
-            <a:endParaRPr/>
+            <a:endParaRPr dirty="0"/>
           </a:p>
           <a:p>
             <a:pPr marL="171450" lvl="0" indent="-171450" algn="l" rtl="0">
@@ -8893,10 +9439,10 @@
               <a:buChar char="-"/>
             </a:pPr>
             <a:r>
-              <a:rPr lang="en-US"/>
+              <a:rPr lang="en-US" dirty="0"/>
               <a:t>Bipartite graph: you can split the vertices in such a way that they only connect to the other group</a:t>
             </a:r>
-            <a:endParaRPr/>
+            <a:endParaRPr dirty="0"/>
           </a:p>
           <a:p>
             <a:pPr marL="171450" lvl="0" indent="-171450" algn="l" rtl="0">
@@ -8914,10 +9460,10 @@
               <a:buChar char="-"/>
             </a:pPr>
             <a:r>
-              <a:rPr lang="en-US"/>
+              <a:rPr lang="en-US" dirty="0"/>
               <a:t>Multigraph: You can have an edge that starts and terminates on itself</a:t>
             </a:r>
-            <a:endParaRPr/>
+            <a:endParaRPr dirty="0"/>
           </a:p>
         </p:txBody>
       </p:sp>
@@ -9090,10 +9636,30 @@
               <a:buNone/>
             </a:pPr>
             <a:r>
-              <a:rPr lang="en-US"/>
-              <a:t>https://wiki.python.org/moin/TimeComplexity</a:t>
-            </a:r>
-            <a:endParaRPr/>
+              <a:rPr lang="en-US" dirty="0"/>
+              <a:t>https://</a:t>
+            </a:r>
+            <a:r>
+              <a:rPr lang="en-US" dirty="0" err="1"/>
+              <a:t>wiki.python.org</a:t>
+            </a:r>
+            <a:r>
+              <a:rPr lang="en-US" dirty="0"/>
+              <a:t>/</a:t>
+            </a:r>
+            <a:r>
+              <a:rPr lang="en-US" dirty="0" err="1"/>
+              <a:t>moin</a:t>
+            </a:r>
+            <a:r>
+              <a:rPr lang="en-US" dirty="0"/>
+              <a:t>/</a:t>
+            </a:r>
+            <a:r>
+              <a:rPr lang="en-US" dirty="0" err="1"/>
+              <a:t>TimeComplexity</a:t>
+            </a:r>
+            <a:endParaRPr dirty="0"/>
           </a:p>
         </p:txBody>
       </p:sp>
@@ -23008,6 +23574,78 @@
                       </p:childTnLst>
                     </p:cTn>
                   </p:par>
+                  <p:par>
+                    <p:cTn id="43" fill="hold">
+                      <p:stCondLst>
+                        <p:cond delay="indefinite"/>
+                      </p:stCondLst>
+                      <p:childTnLst>
+                        <p:par>
+                          <p:cTn id="44" fill="hold">
+                            <p:stCondLst>
+                              <p:cond delay="0"/>
+                            </p:stCondLst>
+                            <p:childTnLst>
+                              <p:par>
+                                <p:cTn id="45" presetID="1" presetClass="entr" presetSubtype="0" fill="hold" nodeType="clickEffect">
+                                  <p:stCondLst>
+                                    <p:cond delay="0"/>
+                                  </p:stCondLst>
+                                  <p:childTnLst>
+                                    <p:set>
+                                      <p:cBhvr>
+                                        <p:cTn id="46" dur="1" fill="hold">
+                                          <p:stCondLst>
+                                            <p:cond delay="0"/>
+                                          </p:stCondLst>
+                                        </p:cTn>
+                                        <p:tgtEl>
+                                          <p:spTgt spid="262"/>
+                                        </p:tgtEl>
+                                        <p:attrNameLst>
+                                          <p:attrName>style.visibility</p:attrName>
+                                        </p:attrNameLst>
+                                      </p:cBhvr>
+                                      <p:to>
+                                        <p:strVal val="visible"/>
+                                      </p:to>
+                                    </p:set>
+                                  </p:childTnLst>
+                                </p:cTn>
+                              </p:par>
+                              <p:par>
+                                <p:cTn id="47" presetID="1" presetClass="entr" presetSubtype="0" fill="hold" nodeType="withEffect">
+                                  <p:stCondLst>
+                                    <p:cond delay="0"/>
+                                  </p:stCondLst>
+                                  <p:childTnLst>
+                                    <p:set>
+                                      <p:cBhvr>
+                                        <p:cTn id="48" dur="1" fill="hold">
+                                          <p:stCondLst>
+                                            <p:cond delay="0"/>
+                                          </p:stCondLst>
+                                        </p:cTn>
+                                        <p:tgtEl>
+                                          <p:spTgt spid="261"/>
+                                        </p:tgtEl>
+                                        <p:attrNameLst>
+                                          <p:attrName>style.visibility</p:attrName>
+                                        </p:attrNameLst>
+                                      </p:cBhvr>
+                                      <p:to>
+                                        <p:strVal val="visible"/>
+                                      </p:to>
+                                    </p:set>
+                                  </p:childTnLst>
+                                </p:cTn>
+                              </p:par>
+                            </p:childTnLst>
+                          </p:cTn>
+                        </p:par>
+                      </p:childTnLst>
+                    </p:cTn>
+                  </p:par>
                 </p:childTnLst>
               </p:cTn>
               <p:prevCondLst>
@@ -23974,6 +24612,78 @@
                       </p:childTnLst>
                     </p:cTn>
                   </p:par>
+                  <p:par>
+                    <p:cTn id="47" fill="hold">
+                      <p:stCondLst>
+                        <p:cond delay="indefinite"/>
+                      </p:stCondLst>
+                      <p:childTnLst>
+                        <p:par>
+                          <p:cTn id="48" fill="hold">
+                            <p:stCondLst>
+                              <p:cond delay="0"/>
+                            </p:stCondLst>
+                            <p:childTnLst>
+                              <p:par>
+                                <p:cTn id="49" presetID="1" presetClass="entr" presetSubtype="0" fill="hold" nodeType="clickEffect">
+                                  <p:stCondLst>
+                                    <p:cond delay="0"/>
+                                  </p:stCondLst>
+                                  <p:childTnLst>
+                                    <p:set>
+                                      <p:cBhvr>
+                                        <p:cTn id="50" dur="1" fill="hold">
+                                          <p:stCondLst>
+                                            <p:cond delay="0"/>
+                                          </p:stCondLst>
+                                        </p:cTn>
+                                        <p:tgtEl>
+                                          <p:spTgt spid="271"/>
+                                        </p:tgtEl>
+                                        <p:attrNameLst>
+                                          <p:attrName>style.visibility</p:attrName>
+                                        </p:attrNameLst>
+                                      </p:cBhvr>
+                                      <p:to>
+                                        <p:strVal val="visible"/>
+                                      </p:to>
+                                    </p:set>
+                                  </p:childTnLst>
+                                </p:cTn>
+                              </p:par>
+                              <p:par>
+                                <p:cTn id="51" presetID="1" presetClass="entr" presetSubtype="0" fill="hold" nodeType="withEffect">
+                                  <p:stCondLst>
+                                    <p:cond delay="0"/>
+                                  </p:stCondLst>
+                                  <p:childTnLst>
+                                    <p:set>
+                                      <p:cBhvr>
+                                        <p:cTn id="52" dur="1" fill="hold">
+                                          <p:stCondLst>
+                                            <p:cond delay="0"/>
+                                          </p:stCondLst>
+                                        </p:cTn>
+                                        <p:tgtEl>
+                                          <p:spTgt spid="272"/>
+                                        </p:tgtEl>
+                                        <p:attrNameLst>
+                                          <p:attrName>style.visibility</p:attrName>
+                                        </p:attrNameLst>
+                                      </p:cBhvr>
+                                      <p:to>
+                                        <p:strVal val="visible"/>
+                                      </p:to>
+                                    </p:set>
+                                  </p:childTnLst>
+                                </p:cTn>
+                              </p:par>
+                            </p:childTnLst>
+                          </p:cTn>
+                        </p:par>
+                      </p:childTnLst>
+                    </p:cTn>
+                  </p:par>
                 </p:childTnLst>
               </p:cTn>
               <p:prevCondLst>
@@ -24272,112 +24982,6 @@
               <a:t>Used in many data structures and algorithms to speed things up!</a:t>
             </a:r>
             <a:endParaRPr sz="2000" dirty="0"/>
-          </a:p>
-        </p:txBody>
-      </p:sp>
-      <p:sp>
-        <p:nvSpPr>
-          <p:cNvPr id="118" name="Google Shape;118;p2"/>
-          <p:cNvSpPr txBox="1"/>
-          <p:nvPr/>
-        </p:nvSpPr>
-        <p:spPr>
-          <a:xfrm>
-            <a:off x="480300" y="5809275"/>
-            <a:ext cx="11231400" cy="989700"/>
-          </a:xfrm>
-          <a:prstGeom prst="rect">
-            <a:avLst/>
-          </a:prstGeom>
-          <a:noFill/>
-          <a:ln>
-            <a:noFill/>
-          </a:ln>
-        </p:spPr>
-        <p:txBody>
-          <a:bodyPr spcFirstLastPara="1" wrap="square" lIns="91425" tIns="45700" rIns="91425" bIns="45700" anchor="t" anchorCtr="0">
-            <a:normAutofit/>
-          </a:bodyPr>
-          <a:lstStyle/>
-          <a:p>
-            <a:pPr marL="457200" marR="0" lvl="0" indent="-355600" algn="l" rtl="0">
-              <a:lnSpc>
-                <a:spcPct val="100000"/>
-              </a:lnSpc>
-              <a:spcBef>
-                <a:spcPts val="0"/>
-              </a:spcBef>
-              <a:spcAft>
-                <a:spcPts val="0"/>
-              </a:spcAft>
-              <a:buClr>
-                <a:srgbClr val="9BAFB5"/>
-              </a:buClr>
-              <a:buSzPts val="2000"/>
-              <a:buFont typeface="Arial"/>
-              <a:buChar char="•"/>
-            </a:pPr>
-            <a:r>
-              <a:rPr lang="en-US" sz="2000" b="0" i="0" u="none" strike="noStrike" cap="none">
-                <a:solidFill>
-                  <a:srgbClr val="262626"/>
-                </a:solidFill>
-                <a:latin typeface="Gill Sans"/>
-                <a:ea typeface="Gill Sans"/>
-                <a:cs typeface="Gill Sans"/>
-                <a:sym typeface="Gill Sans"/>
-              </a:rPr>
-              <a:t>Sources:</a:t>
-            </a:r>
-            <a:endParaRPr sz="2000" b="0" i="0" u="none" strike="noStrike" cap="none">
-              <a:solidFill>
-                <a:srgbClr val="262626"/>
-              </a:solidFill>
-              <a:latin typeface="Gill Sans"/>
-              <a:ea typeface="Gill Sans"/>
-              <a:cs typeface="Gill Sans"/>
-              <a:sym typeface="Gill Sans"/>
-            </a:endParaRPr>
-          </a:p>
-          <a:p>
-            <a:pPr marL="914400" marR="0" lvl="1" indent="-355600" algn="l" rtl="0">
-              <a:lnSpc>
-                <a:spcPct val="100000"/>
-              </a:lnSpc>
-              <a:spcBef>
-                <a:spcPts val="0"/>
-              </a:spcBef>
-              <a:spcAft>
-                <a:spcPts val="0"/>
-              </a:spcAft>
-              <a:buClr>
-                <a:srgbClr val="262626"/>
-              </a:buClr>
-              <a:buSzPts val="2000"/>
-              <a:buFont typeface="Gill Sans"/>
-              <a:buChar char="•"/>
-            </a:pPr>
-            <a:r>
-              <a:rPr lang="en-US" sz="2000" b="0" i="0" u="none" strike="noStrike" cap="none">
-                <a:solidFill>
-                  <a:srgbClr val="262626"/>
-                </a:solidFill>
-                <a:latin typeface="Gill Sans"/>
-                <a:ea typeface="Gill Sans"/>
-                <a:cs typeface="Gill Sans"/>
-                <a:sym typeface="Gill Sans"/>
-              </a:rPr>
-              <a:t>Competitive Programming 4 Section 2.2.3</a:t>
-            </a:r>
-            <a:endParaRPr sz="2000" b="0" i="0" u="none" strike="noStrike" cap="none">
-              <a:solidFill>
-                <a:srgbClr val="262626"/>
-              </a:solidFill>
-              <a:latin typeface="Gill Sans"/>
-              <a:ea typeface="Gill Sans"/>
-              <a:cs typeface="Gill Sans"/>
-              <a:sym typeface="Gill Sans"/>
-            </a:endParaRPr>
           </a:p>
         </p:txBody>
       </p:sp>
@@ -29137,7 +29741,7 @@
         <p:spPr>
           <a:xfrm>
             <a:off x="494675" y="1096824"/>
-            <a:ext cx="11231400" cy="4561025"/>
+            <a:ext cx="11231400" cy="2678007"/>
           </a:xfrm>
           <a:prstGeom prst="rect">
             <a:avLst/>
@@ -29364,38 +29968,8 @@
         </p:blipFill>
         <p:spPr>
           <a:xfrm>
-            <a:off x="689660" y="4004650"/>
+            <a:off x="676960" y="4116352"/>
             <a:ext cx="2540000" cy="800100"/>
-          </a:xfrm>
-          <a:prstGeom prst="rect">
-            <a:avLst/>
-          </a:prstGeom>
-        </p:spPr>
-      </p:pic>
-      <p:pic>
-        <p:nvPicPr>
-          <p:cNvPr id="4" name="Picture 3">
-            <a:extLst>
-              <a:ext uri="{FF2B5EF4-FFF2-40B4-BE49-F238E27FC236}">
-                <a16:creationId xmlns:a16="http://schemas.microsoft.com/office/drawing/2014/main" id="{6C108BEE-FAA6-19D7-D30E-CFD6AE7534F3}"/>
-              </a:ext>
-            </a:extLst>
-          </p:cNvPr>
-          <p:cNvPicPr>
-            <a:picLocks noChangeAspect="1"/>
-          </p:cNvPicPr>
-          <p:nvPr/>
-        </p:nvPicPr>
-        <p:blipFill>
-          <a:blip r:embed="rId6"/>
-          <a:stretch>
-            <a:fillRect/>
-          </a:stretch>
-        </p:blipFill>
-        <p:spPr>
-          <a:xfrm>
-            <a:off x="689660" y="4822752"/>
-            <a:ext cx="4445000" cy="1003300"/>
           </a:xfrm>
           <a:prstGeom prst="rect">
             <a:avLst/>
@@ -29417,7 +29991,7 @@
           <p:nvPr/>
         </p:nvPicPr>
         <p:blipFill>
-          <a:blip r:embed="rId7"/>
+          <a:blip r:embed="rId6"/>
           <a:stretch>
             <a:fillRect/>
           </a:stretch>
@@ -29426,6 +30000,36 @@
           <a:xfrm>
             <a:off x="676960" y="5864152"/>
             <a:ext cx="4457700" cy="977900"/>
+          </a:xfrm>
+          <a:prstGeom prst="rect">
+            <a:avLst/>
+          </a:prstGeom>
+        </p:spPr>
+      </p:pic>
+      <p:pic>
+        <p:nvPicPr>
+          <p:cNvPr id="7" name="Picture 6">
+            <a:extLst>
+              <a:ext uri="{FF2B5EF4-FFF2-40B4-BE49-F238E27FC236}">
+                <a16:creationId xmlns:a16="http://schemas.microsoft.com/office/drawing/2014/main" id="{203F432C-FD61-35D7-AC05-AA6BE01572A8}"/>
+              </a:ext>
+            </a:extLst>
+          </p:cNvPr>
+          <p:cNvPicPr>
+            <a:picLocks noChangeAspect="1"/>
+          </p:cNvPicPr>
+          <p:nvPr/>
+        </p:nvPicPr>
+        <p:blipFill>
+          <a:blip r:embed="rId7"/>
+          <a:stretch>
+            <a:fillRect/>
+          </a:stretch>
+        </p:blipFill>
+        <p:spPr>
+          <a:xfrm>
+            <a:off x="676960" y="5083555"/>
+            <a:ext cx="2438400" cy="533400"/>
           </a:xfrm>
           <a:prstGeom prst="rect">
             <a:avLst/>
@@ -29815,6 +30419,186 @@
                                         </p:cTn>
                                         <p:tgtEl>
                                           <p:spTgt spid="151"/>
+                                        </p:tgtEl>
+                                        <p:attrNameLst>
+                                          <p:attrName>style.visibility</p:attrName>
+                                        </p:attrNameLst>
+                                      </p:cBhvr>
+                                      <p:to>
+                                        <p:strVal val="visible"/>
+                                      </p:to>
+                                    </p:set>
+                                  </p:childTnLst>
+                                </p:cTn>
+                              </p:par>
+                            </p:childTnLst>
+                          </p:cTn>
+                        </p:par>
+                      </p:childTnLst>
+                    </p:cTn>
+                  </p:par>
+                  <p:par>
+                    <p:cTn id="35" fill="hold">
+                      <p:stCondLst>
+                        <p:cond delay="indefinite"/>
+                      </p:stCondLst>
+                      <p:childTnLst>
+                        <p:par>
+                          <p:cTn id="36" fill="hold">
+                            <p:stCondLst>
+                              <p:cond delay="0"/>
+                            </p:stCondLst>
+                            <p:childTnLst>
+                              <p:par>
+                                <p:cTn id="37" presetID="1" presetClass="entr" presetSubtype="0" fill="hold" nodeType="clickEffect">
+                                  <p:stCondLst>
+                                    <p:cond delay="0"/>
+                                  </p:stCondLst>
+                                  <p:childTnLst>
+                                    <p:set>
+                                      <p:cBhvr>
+                                        <p:cTn id="38" dur="1" fill="hold">
+                                          <p:stCondLst>
+                                            <p:cond delay="0"/>
+                                          </p:stCondLst>
+                                        </p:cTn>
+                                        <p:tgtEl>
+                                          <p:spTgt spid="2"/>
+                                        </p:tgtEl>
+                                        <p:attrNameLst>
+                                          <p:attrName>style.visibility</p:attrName>
+                                        </p:attrNameLst>
+                                      </p:cBhvr>
+                                      <p:to>
+                                        <p:strVal val="visible"/>
+                                      </p:to>
+                                    </p:set>
+                                  </p:childTnLst>
+                                </p:cTn>
+                              </p:par>
+                            </p:childTnLst>
+                          </p:cTn>
+                        </p:par>
+                      </p:childTnLst>
+                    </p:cTn>
+                  </p:par>
+                  <p:par>
+                    <p:cTn id="39" fill="hold">
+                      <p:stCondLst>
+                        <p:cond delay="indefinite"/>
+                      </p:stCondLst>
+                      <p:childTnLst>
+                        <p:par>
+                          <p:cTn id="40" fill="hold">
+                            <p:stCondLst>
+                              <p:cond delay="0"/>
+                            </p:stCondLst>
+                            <p:childTnLst>
+                              <p:par>
+                                <p:cTn id="41" presetID="1" presetClass="entr" presetSubtype="0" fill="hold" nodeType="clickEffect">
+                                  <p:stCondLst>
+                                    <p:cond delay="0"/>
+                                  </p:stCondLst>
+                                  <p:childTnLst>
+                                    <p:set>
+                                      <p:cBhvr>
+                                        <p:cTn id="42" dur="1" fill="hold">
+                                          <p:stCondLst>
+                                            <p:cond delay="0"/>
+                                          </p:stCondLst>
+                                        </p:cTn>
+                                        <p:tgtEl>
+                                          <p:spTgt spid="3"/>
+                                        </p:tgtEl>
+                                        <p:attrNameLst>
+                                          <p:attrName>style.visibility</p:attrName>
+                                        </p:attrNameLst>
+                                      </p:cBhvr>
+                                      <p:to>
+                                        <p:strVal val="visible"/>
+                                      </p:to>
+                                    </p:set>
+                                  </p:childTnLst>
+                                </p:cTn>
+                              </p:par>
+                            </p:childTnLst>
+                          </p:cTn>
+                        </p:par>
+                      </p:childTnLst>
+                    </p:cTn>
+                  </p:par>
+                  <p:par>
+                    <p:cTn id="43" fill="hold">
+                      <p:stCondLst>
+                        <p:cond delay="indefinite"/>
+                      </p:stCondLst>
+                      <p:childTnLst>
+                        <p:par>
+                          <p:cTn id="44" fill="hold">
+                            <p:stCondLst>
+                              <p:cond delay="0"/>
+                            </p:stCondLst>
+                            <p:childTnLst>
+                              <p:par>
+                                <p:cTn id="45" presetID="1" presetClass="entr" presetSubtype="0" fill="hold" nodeType="clickEffect">
+                                  <p:stCondLst>
+                                    <p:cond delay="0"/>
+                                  </p:stCondLst>
+                                  <p:childTnLst>
+                                    <p:set>
+                                      <p:cBhvr>
+                                        <p:cTn id="46" dur="1" fill="hold">
+                                          <p:stCondLst>
+                                            <p:cond delay="0"/>
+                                          </p:stCondLst>
+                                        </p:cTn>
+                                        <p:tgtEl>
+                                          <p:spTgt spid="7"/>
+                                        </p:tgtEl>
+                                        <p:attrNameLst>
+                                          <p:attrName>style.visibility</p:attrName>
+                                        </p:attrNameLst>
+                                      </p:cBhvr>
+                                      <p:to>
+                                        <p:strVal val="visible"/>
+                                      </p:to>
+                                    </p:set>
+                                  </p:childTnLst>
+                                </p:cTn>
+                              </p:par>
+                            </p:childTnLst>
+                          </p:cTn>
+                        </p:par>
+                      </p:childTnLst>
+                    </p:cTn>
+                  </p:par>
+                  <p:par>
+                    <p:cTn id="47" fill="hold">
+                      <p:stCondLst>
+                        <p:cond delay="indefinite"/>
+                      </p:stCondLst>
+                      <p:childTnLst>
+                        <p:par>
+                          <p:cTn id="48" fill="hold">
+                            <p:stCondLst>
+                              <p:cond delay="0"/>
+                            </p:stCondLst>
+                            <p:childTnLst>
+                              <p:par>
+                                <p:cTn id="49" presetID="1" presetClass="entr" presetSubtype="0" fill="hold" nodeType="clickEffect">
+                                  <p:stCondLst>
+                                    <p:cond delay="0"/>
+                                  </p:stCondLst>
+                                  <p:childTnLst>
+                                    <p:set>
+                                      <p:cBhvr>
+                                        <p:cTn id="50" dur="1" fill="hold">
+                                          <p:stCondLst>
+                                            <p:cond delay="0"/>
+                                          </p:stCondLst>
+                                        </p:cTn>
+                                        <p:tgtEl>
+                                          <p:spTgt spid="5"/>
                                         </p:tgtEl>
                                         <p:attrNameLst>
                                           <p:attrName>style.visibility</p:attrName>
@@ -44814,6 +45598,105 @@
                       </p:childTnLst>
                     </p:cTn>
                   </p:par>
+                  <p:par>
+                    <p:cTn id="39" fill="hold">
+                      <p:stCondLst>
+                        <p:cond delay="indefinite"/>
+                      </p:stCondLst>
+                      <p:childTnLst>
+                        <p:par>
+                          <p:cTn id="40" fill="hold">
+                            <p:stCondLst>
+                              <p:cond delay="0"/>
+                            </p:stCondLst>
+                            <p:childTnLst>
+                              <p:par>
+                                <p:cTn id="41" presetID="1" presetClass="entr" presetSubtype="0" fill="hold" nodeType="clickEffect">
+                                  <p:stCondLst>
+                                    <p:cond delay="0"/>
+                                  </p:stCondLst>
+                                  <p:childTnLst>
+                                    <p:set>
+                                      <p:cBhvr>
+                                        <p:cTn id="42" dur="1" fill="hold">
+                                          <p:stCondLst>
+                                            <p:cond delay="0"/>
+                                          </p:stCondLst>
+                                        </p:cTn>
+                                        <p:tgtEl>
+                                          <p:spTgt spid="4"/>
+                                        </p:tgtEl>
+                                        <p:attrNameLst>
+                                          <p:attrName>style.visibility</p:attrName>
+                                        </p:attrNameLst>
+                                      </p:cBhvr>
+                                      <p:to>
+                                        <p:strVal val="visible"/>
+                                      </p:to>
+                                    </p:set>
+                                  </p:childTnLst>
+                                </p:cTn>
+                              </p:par>
+                              <p:par>
+                                <p:cTn id="43" presetID="1" presetClass="entr" presetSubtype="0" fill="hold" nodeType="withEffect">
+                                  <p:stCondLst>
+                                    <p:cond delay="0"/>
+                                  </p:stCondLst>
+                                  <p:childTnLst>
+                                    <p:set>
+                                      <p:cBhvr>
+                                        <p:cTn id="44" dur="1" fill="hold">
+                                          <p:stCondLst>
+                                            <p:cond delay="0"/>
+                                          </p:stCondLst>
+                                        </p:cTn>
+                                        <p:tgtEl>
+                                          <p:spTgt spid="2"/>
+                                        </p:tgtEl>
+                                        <p:attrNameLst>
+                                          <p:attrName>style.visibility</p:attrName>
+                                        </p:attrNameLst>
+                                      </p:cBhvr>
+                                      <p:to>
+                                        <p:strVal val="visible"/>
+                                      </p:to>
+                                    </p:set>
+                                  </p:childTnLst>
+                                </p:cTn>
+                              </p:par>
+                              <p:par>
+                                <p:cTn id="45" presetID="1" presetClass="entr" presetSubtype="0" fill="hold" nodeType="withEffect">
+                                  <p:stCondLst>
+                                    <p:cond delay="0"/>
+                                  </p:stCondLst>
+                                  <p:childTnLst>
+                                    <p:set>
+                                      <p:cBhvr>
+                                        <p:cTn id="46" dur="1" fill="hold">
+                                          <p:stCondLst>
+                                            <p:cond delay="0"/>
+                                          </p:stCondLst>
+                                        </p:cTn>
+                                        <p:tgtEl>
+                                          <p:spTgt spid="3"/>
+                                        </p:tgtEl>
+                                        <p:attrNameLst>
+                                          <p:attrName>style.visibility</p:attrName>
+                                        </p:attrNameLst>
+                                      </p:cBhvr>
+                                      <p:to>
+                                        <p:strVal val="visible"/>
+                                      </p:to>
+                                    </p:set>
+                                  </p:childTnLst>
+                                </p:cTn>
+                              </p:par>
+                            </p:childTnLst>
+                          </p:cTn>
+                        </p:par>
+                      </p:childTnLst>
+                    </p:cTn>
+                  </p:par>
                 </p:childTnLst>
               </p:cTn>
               <p:prevCondLst>
@@ -45542,6 +46425,51 @@
                                               <p:pRg st="4" end="4"/>
                                             </p:txEl>
                                           </p:spTgt>
+                                        </p:tgtEl>
+                                        <p:attrNameLst>
+                                          <p:attrName>style.visibility</p:attrName>
+                                        </p:attrNameLst>
+                                      </p:cBhvr>
+                                      <p:to>
+                                        <p:strVal val="visible"/>
+                                      </p:to>
+                                    </p:set>
+                                  </p:childTnLst>
+                                </p:cTn>
+                              </p:par>
+                            </p:childTnLst>
+                          </p:cTn>
+                        </p:par>
+                      </p:childTnLst>
+                    </p:cTn>
+                  </p:par>
+                  <p:par>
+                    <p:cTn id="23" fill="hold">
+                      <p:stCondLst>
+                        <p:cond delay="indefinite"/>
+                      </p:stCondLst>
+                      <p:childTnLst>
+                        <p:par>
+                          <p:cTn id="24" fill="hold">
+                            <p:stCondLst>
+                              <p:cond delay="0"/>
+                            </p:stCondLst>
+                            <p:childTnLst>
+                              <p:par>
+                                <p:cTn id="25" presetID="1" presetClass="entr" presetSubtype="0" fill="hold" nodeType="clickEffect">
+                                  <p:stCondLst>
+                                    <p:cond delay="0"/>
+                                  </p:stCondLst>
+                                  <p:childTnLst>
+                                    <p:set>
+                                      <p:cBhvr>
+                                        <p:cTn id="26" dur="1" fill="hold">
+                                          <p:stCondLst>
+                                            <p:cond delay="0"/>
+                                          </p:stCondLst>
+                                        </p:cTn>
+                                        <p:tgtEl>
+                                          <p:spTgt spid="2"/>
                                         </p:tgtEl>
                                         <p:attrNameLst>
                                           <p:attrName>style.visibility</p:attrName>
@@ -46285,6 +47213,78 @@
                       </p:childTnLst>
                     </p:cTn>
                   </p:par>
+                  <p:par>
+                    <p:cTn id="23" fill="hold">
+                      <p:stCondLst>
+                        <p:cond delay="indefinite"/>
+                      </p:stCondLst>
+                      <p:childTnLst>
+                        <p:par>
+                          <p:cTn id="24" fill="hold">
+                            <p:stCondLst>
+                              <p:cond delay="0"/>
+                            </p:stCondLst>
+                            <p:childTnLst>
+                              <p:par>
+                                <p:cTn id="25" presetID="1" presetClass="entr" presetSubtype="0" fill="hold" nodeType="clickEffect">
+                                  <p:stCondLst>
+                                    <p:cond delay="0"/>
+                                  </p:stCondLst>
+                                  <p:childTnLst>
+                                    <p:set>
+                                      <p:cBhvr>
+                                        <p:cTn id="26" dur="1" fill="hold">
+                                          <p:stCondLst>
+                                            <p:cond delay="0"/>
+                                          </p:stCondLst>
+                                        </p:cTn>
+                                        <p:tgtEl>
+                                          <p:spTgt spid="201"/>
+                                        </p:tgtEl>
+                                        <p:attrNameLst>
+                                          <p:attrName>style.visibility</p:attrName>
+                                        </p:attrNameLst>
+                                      </p:cBhvr>
+                                      <p:to>
+                                        <p:strVal val="visible"/>
+                                      </p:to>
+                                    </p:set>
+                                  </p:childTnLst>
+                                </p:cTn>
+                              </p:par>
+                              <p:par>
+                                <p:cTn id="27" presetID="1" presetClass="entr" presetSubtype="0" fill="hold" nodeType="withEffect">
+                                  <p:stCondLst>
+                                    <p:cond delay="0"/>
+                                  </p:stCondLst>
+                                  <p:childTnLst>
+                                    <p:set>
+                                      <p:cBhvr>
+                                        <p:cTn id="28" dur="1" fill="hold">
+                                          <p:stCondLst>
+                                            <p:cond delay="0"/>
+                                          </p:stCondLst>
+                                        </p:cTn>
+                                        <p:tgtEl>
+                                          <p:spTgt spid="7"/>
+                                        </p:tgtEl>
+                                        <p:attrNameLst>
+                                          <p:attrName>style.visibility</p:attrName>
+                                        </p:attrNameLst>
+                                      </p:cBhvr>
+                                      <p:to>
+                                        <p:strVal val="visible"/>
+                                      </p:to>
+                                    </p:set>
+                                  </p:childTnLst>
+                                </p:cTn>
+                              </p:par>
+                            </p:childTnLst>
+                          </p:cTn>
+                        </p:par>
+                      </p:childTnLst>
+                    </p:cTn>
+                  </p:par>
                 </p:childTnLst>
               </p:cTn>
               <p:prevCondLst>
@@ -46751,6 +47751,51 @@
                                               <p:pRg st="4" end="4"/>
                                             </p:txEl>
                                           </p:spTgt>
+                                        </p:tgtEl>
+                                        <p:attrNameLst>
+                                          <p:attrName>style.visibility</p:attrName>
+                                        </p:attrNameLst>
+                                      </p:cBhvr>
+                                      <p:to>
+                                        <p:strVal val="visible"/>
+                                      </p:to>
+                                    </p:set>
+                                  </p:childTnLst>
+                                </p:cTn>
+                              </p:par>
+                            </p:childTnLst>
+                          </p:cTn>
+                        </p:par>
+                      </p:childTnLst>
+                    </p:cTn>
+                  </p:par>
+                  <p:par>
+                    <p:cTn id="23" fill="hold">
+                      <p:stCondLst>
+                        <p:cond delay="indefinite"/>
+                      </p:stCondLst>
+                      <p:childTnLst>
+                        <p:par>
+                          <p:cTn id="24" fill="hold">
+                            <p:stCondLst>
+                              <p:cond delay="0"/>
+                            </p:stCondLst>
+                            <p:childTnLst>
+                              <p:par>
+                                <p:cTn id="25" presetID="1" presetClass="entr" presetSubtype="0" fill="hold" nodeType="clickEffect">
+                                  <p:stCondLst>
+                                    <p:cond delay="0"/>
+                                  </p:stCondLst>
+                                  <p:childTnLst>
+                                    <p:set>
+                                      <p:cBhvr>
+                                        <p:cTn id="26" dur="1" fill="hold">
+                                          <p:stCondLst>
+                                            <p:cond delay="0"/>
+                                          </p:stCondLst>
+                                        </p:cTn>
+                                        <p:tgtEl>
+                                          <p:spTgt spid="209"/>
                                         </p:tgtEl>
                                         <p:attrNameLst>
                                           <p:attrName>style.visibility</p:attrName>
@@ -47596,6 +48641,159 @@
                       </p:childTnLst>
                     </p:cTn>
                   </p:par>
+                  <p:par>
+                    <p:cTn id="35" fill="hold">
+                      <p:stCondLst>
+                        <p:cond delay="indefinite"/>
+                      </p:stCondLst>
+                      <p:childTnLst>
+                        <p:par>
+                          <p:cTn id="36" fill="hold">
+                            <p:stCondLst>
+                              <p:cond delay="0"/>
+                            </p:stCondLst>
+                            <p:childTnLst>
+                              <p:par>
+                                <p:cTn id="37" presetID="1" presetClass="entr" presetSubtype="0" fill="hold" nodeType="clickEffect">
+                                  <p:stCondLst>
+                                    <p:cond delay="0"/>
+                                  </p:stCondLst>
+                                  <p:childTnLst>
+                                    <p:set>
+                                      <p:cBhvr>
+                                        <p:cTn id="38" dur="1" fill="hold">
+                                          <p:stCondLst>
+                                            <p:cond delay="0"/>
+                                          </p:stCondLst>
+                                        </p:cTn>
+                                        <p:tgtEl>
+                                          <p:spTgt spid="3"/>
+                                        </p:tgtEl>
+                                        <p:attrNameLst>
+                                          <p:attrName>style.visibility</p:attrName>
+                                        </p:attrNameLst>
+                                      </p:cBhvr>
+                                      <p:to>
+                                        <p:strVal val="visible"/>
+                                      </p:to>
+                                    </p:set>
+                                  </p:childTnLst>
+                                </p:cTn>
+                              </p:par>
+                              <p:par>
+                                <p:cTn id="39" presetID="1" presetClass="entr" presetSubtype="0" fill="hold" nodeType="withEffect">
+                                  <p:stCondLst>
+                                    <p:cond delay="0"/>
+                                  </p:stCondLst>
+                                  <p:childTnLst>
+                                    <p:set>
+                                      <p:cBhvr>
+                                        <p:cTn id="40" dur="1" fill="hold">
+                                          <p:stCondLst>
+                                            <p:cond delay="0"/>
+                                          </p:stCondLst>
+                                        </p:cTn>
+                                        <p:tgtEl>
+                                          <p:spTgt spid="2"/>
+                                        </p:tgtEl>
+                                        <p:attrNameLst>
+                                          <p:attrName>style.visibility</p:attrName>
+                                        </p:attrNameLst>
+                                      </p:cBhvr>
+                                      <p:to>
+                                        <p:strVal val="visible"/>
+                                      </p:to>
+                                    </p:set>
+                                  </p:childTnLst>
+                                </p:cTn>
+                              </p:par>
+                              <p:par>
+                                <p:cTn id="41" presetID="1" presetClass="entr" presetSubtype="0" fill="hold" nodeType="withEffect">
+                                  <p:stCondLst>
+                                    <p:cond delay="0"/>
+                                  </p:stCondLst>
+                                  <p:childTnLst>
+                                    <p:set>
+                                      <p:cBhvr>
+                                        <p:cTn id="42" dur="1" fill="hold">
+                                          <p:stCondLst>
+                                            <p:cond delay="0"/>
+                                          </p:stCondLst>
+                                        </p:cTn>
+                                        <p:tgtEl>
+                                          <p:spTgt spid="228"/>
+                                        </p:tgtEl>
+                                        <p:attrNameLst>
+                                          <p:attrName>style.visibility</p:attrName>
+                                        </p:attrNameLst>
+                                      </p:cBhvr>
+                                      <p:to>
+                                        <p:strVal val="visible"/>
+                                      </p:to>
+                                    </p:set>
+                                  </p:childTnLst>
+                                </p:cTn>
+                              </p:par>
+                              <p:par>
+                                <p:cTn id="43" presetID="1" presetClass="entr" presetSubtype="0" fill="hold" nodeType="withEffect">
+                                  <p:stCondLst>
+                                    <p:cond delay="0"/>
+                                  </p:stCondLst>
+                                  <p:childTnLst>
+                                    <p:set>
+                                      <p:cBhvr>
+                                        <p:cTn id="44" dur="1" fill="hold">
+                                          <p:stCondLst>
+                                            <p:cond delay="0"/>
+                                          </p:stCondLst>
+                                        </p:cTn>
+                                        <p:tgtEl>
+                                          <p:spTgt spid="229"/>
+                                        </p:tgtEl>
+                                        <p:attrNameLst>
+                                          <p:attrName>style.visibility</p:attrName>
+                                        </p:attrNameLst>
+                                      </p:cBhvr>
+                                      <p:to>
+                                        <p:strVal val="visible"/>
+                                      </p:to>
+                                    </p:set>
+                                  </p:childTnLst>
+                                </p:cTn>
+                              </p:par>
+                              <p:par>
+                                <p:cTn id="45" presetID="1" presetClass="entr" presetSubtype="0" fill="hold" nodeType="withEffect">
+                                  <p:stCondLst>
+                                    <p:cond delay="0"/>
+                                  </p:stCondLst>
+                                  <p:childTnLst>
+                                    <p:set>
+                                      <p:cBhvr>
+                                        <p:cTn id="46" dur="1" fill="hold">
+                                          <p:stCondLst>
+                                            <p:cond delay="0"/>
+                                          </p:stCondLst>
+                                        </p:cTn>
+                                        <p:tgtEl>
+                                          <p:spTgt spid="230"/>
+                                        </p:tgtEl>
+                                        <p:attrNameLst>
+                                          <p:attrName>style.visibility</p:attrName>
+                                        </p:attrNameLst>
+                                      </p:cBhvr>
+                                      <p:to>
+                                        <p:strVal val="visible"/>
+                                      </p:to>
+                                    </p:set>
+                                  </p:childTnLst>
+                                </p:cTn>
+                              </p:par>
+                            </p:childTnLst>
+                          </p:cTn>
+                        </p:par>
+                      </p:childTnLst>
+                    </p:cTn>
+                  </p:par>
                 </p:childTnLst>
               </p:cTn>
               <p:prevCondLst>
@@ -48401,6 +49599,78 @@
                                               <p:pRg st="8" end="8"/>
                                             </p:txEl>
                                           </p:spTgt>
+                                        </p:tgtEl>
+                                        <p:attrNameLst>
+                                          <p:attrName>style.visibility</p:attrName>
+                                        </p:attrNameLst>
+                                      </p:cBhvr>
+                                      <p:to>
+                                        <p:strVal val="visible"/>
+                                      </p:to>
+                                    </p:set>
+                                  </p:childTnLst>
+                                </p:cTn>
+                              </p:par>
+                            </p:childTnLst>
+                          </p:cTn>
+                        </p:par>
+                      </p:childTnLst>
+                    </p:cTn>
+                  </p:par>
+                  <p:par>
+                    <p:cTn id="39" fill="hold">
+                      <p:stCondLst>
+                        <p:cond delay="indefinite"/>
+                      </p:stCondLst>
+                      <p:childTnLst>
+                        <p:par>
+                          <p:cTn id="40" fill="hold">
+                            <p:stCondLst>
+                              <p:cond delay="0"/>
+                            </p:stCondLst>
+                            <p:childTnLst>
+                              <p:par>
+                                <p:cTn id="41" presetID="1" presetClass="entr" presetSubtype="0" fill="hold" nodeType="clickEffect">
+                                  <p:stCondLst>
+                                    <p:cond delay="0"/>
+                                  </p:stCondLst>
+                                  <p:childTnLst>
+                                    <p:set>
+                                      <p:cBhvr>
+                                        <p:cTn id="42" dur="1" fill="hold">
+                                          <p:stCondLst>
+                                            <p:cond delay="0"/>
+                                          </p:stCondLst>
+                                        </p:cTn>
+                                        <p:tgtEl>
+                                          <p:spTgt spid="251"/>
+                                        </p:tgtEl>
+                                        <p:attrNameLst>
+                                          <p:attrName>style.visibility</p:attrName>
+                                        </p:attrNameLst>
+                                      </p:cBhvr>
+                                      <p:to>
+                                        <p:strVal val="visible"/>
+                                      </p:to>
+                                    </p:set>
+                                  </p:childTnLst>
+                                </p:cTn>
+                              </p:par>
+                              <p:par>
+                                <p:cTn id="43" presetID="1" presetClass="entr" presetSubtype="0" fill="hold" nodeType="withEffect">
+                                  <p:stCondLst>
+                                    <p:cond delay="0"/>
+                                  </p:stCondLst>
+                                  <p:childTnLst>
+                                    <p:set>
+                                      <p:cBhvr>
+                                        <p:cTn id="44" dur="1" fill="hold">
+                                          <p:stCondLst>
+                                            <p:cond delay="0"/>
+                                          </p:stCondLst>
+                                        </p:cTn>
+                                        <p:tgtEl>
+                                          <p:spTgt spid="252"/>
                                         </p:tgtEl>
                                         <p:attrNameLst>
                                           <p:attrName>style.visibility</p:attrName>
